--- a/presentation_litres.pptx
+++ b/presentation_litres.pptx
@@ -258,7 +258,7 @@
           <a:p>
             <a:fld id="{CAAF16A9-B34B-4F3D-838F-352F13BB605C}" type="datetimeFigureOut">
               <a:rPr lang="ru-RU" smtClean="0"/>
-              <a:t>05.04.2026</a:t>
+              <a:t>11.04.2026</a:t>
             </a:fld>
             <a:endParaRPr lang="ru-RU"/>
           </a:p>
@@ -571,7 +571,7 @@
           <a:p>
             <a:fld id="{CAAF16A9-B34B-4F3D-838F-352F13BB605C}" type="datetimeFigureOut">
               <a:rPr lang="ru-RU" smtClean="0"/>
-              <a:t>05.04.2026</a:t>
+              <a:t>11.04.2026</a:t>
             </a:fld>
             <a:endParaRPr lang="ru-RU"/>
           </a:p>
@@ -756,7 +756,7 @@
           <a:p>
             <a:fld id="{CAAF16A9-B34B-4F3D-838F-352F13BB605C}" type="datetimeFigureOut">
               <a:rPr lang="ru-RU" smtClean="0"/>
-              <a:t>05.04.2026</a:t>
+              <a:t>11.04.2026</a:t>
             </a:fld>
             <a:endParaRPr lang="ru-RU"/>
           </a:p>
@@ -931,7 +931,7 @@
           <a:p>
             <a:fld id="{CAAF16A9-B34B-4F3D-838F-352F13BB605C}" type="datetimeFigureOut">
               <a:rPr lang="ru-RU" smtClean="0"/>
-              <a:t>05.04.2026</a:t>
+              <a:t>11.04.2026</a:t>
             </a:fld>
             <a:endParaRPr lang="ru-RU"/>
           </a:p>
@@ -1199,7 +1199,7 @@
           <a:p>
             <a:fld id="{CAAF16A9-B34B-4F3D-838F-352F13BB605C}" type="datetimeFigureOut">
               <a:rPr lang="ru-RU" smtClean="0"/>
-              <a:t>05.04.2026</a:t>
+              <a:t>11.04.2026</a:t>
             </a:fld>
             <a:endParaRPr lang="ru-RU"/>
           </a:p>
@@ -1667,7 +1667,7 @@
           <a:p>
             <a:fld id="{CAAF16A9-B34B-4F3D-838F-352F13BB605C}" type="datetimeFigureOut">
               <a:rPr lang="ru-RU" smtClean="0"/>
-              <a:t>05.04.2026</a:t>
+              <a:t>11.04.2026</a:t>
             </a:fld>
             <a:endParaRPr lang="ru-RU"/>
           </a:p>
@@ -2156,7 +2156,7 @@
           <a:p>
             <a:fld id="{CAAF16A9-B34B-4F3D-838F-352F13BB605C}" type="datetimeFigureOut">
               <a:rPr lang="ru-RU" smtClean="0"/>
-              <a:t>05.04.2026</a:t>
+              <a:t>11.04.2026</a:t>
             </a:fld>
             <a:endParaRPr lang="ru-RU"/>
           </a:p>
@@ -2282,7 +2282,7 @@
           <a:p>
             <a:fld id="{CAAF16A9-B34B-4F3D-838F-352F13BB605C}" type="datetimeFigureOut">
               <a:rPr lang="ru-RU" smtClean="0"/>
-              <a:t>05.04.2026</a:t>
+              <a:t>11.04.2026</a:t>
             </a:fld>
             <a:endParaRPr lang="ru-RU"/>
           </a:p>
@@ -2426,7 +2426,7 @@
           <a:p>
             <a:fld id="{CAAF16A9-B34B-4F3D-838F-352F13BB605C}" type="datetimeFigureOut">
               <a:rPr lang="ru-RU" smtClean="0"/>
-              <a:t>05.04.2026</a:t>
+              <a:t>11.04.2026</a:t>
             </a:fld>
             <a:endParaRPr lang="ru-RU"/>
           </a:p>
@@ -2748,7 +2748,7 @@
           <a:p>
             <a:fld id="{CAAF16A9-B34B-4F3D-838F-352F13BB605C}" type="datetimeFigureOut">
               <a:rPr lang="ru-RU" smtClean="0"/>
-              <a:t>05.04.2026</a:t>
+              <a:t>11.04.2026</a:t>
             </a:fld>
             <a:endParaRPr lang="ru-RU"/>
           </a:p>
@@ -2882,7 +2882,7 @@
           <a:p>
             <a:fld id="{CAAF16A9-B34B-4F3D-838F-352F13BB605C}" type="datetimeFigureOut">
               <a:rPr lang="ru-RU" smtClean="0"/>
-              <a:t>05.04.2026</a:t>
+              <a:t>11.04.2026</a:t>
             </a:fld>
             <a:endParaRPr lang="ru-RU"/>
           </a:p>
@@ -3663,7 +3663,7 @@
           <a:p>
             <a:fld id="{CAAF16A9-B34B-4F3D-838F-352F13BB605C}" type="datetimeFigureOut">
               <a:rPr lang="ru-RU" smtClean="0"/>
-              <a:t>05.04.2026</a:t>
+              <a:t>11.04.2026</a:t>
             </a:fld>
             <a:endParaRPr lang="ru-RU"/>
           </a:p>
@@ -4528,7 +4528,7 @@
           <a:graphicData uri="http://schemas.openxmlformats.org/presentationml/2006/ole">
             <mc:AlternateContent xmlns:mc="http://schemas.openxmlformats.org/markup-compatibility/2006">
               <mc:Choice xmlns:v="urn:schemas-microsoft-com:vml" Requires="v">
-                <p:oleObj spid="_x0000_s4104" name="Worksheet" r:id="rId3" imgW="11706447" imgH="8943857" progId="Excel.Sheet.12">
+                <p:oleObj spid="_x0000_s4106" name="Worksheet" r:id="rId3" imgW="11706447" imgH="8943857" progId="Excel.Sheet.12">
                   <p:embed/>
                 </p:oleObj>
               </mc:Choice>
@@ -6291,7 +6291,7 @@
         <p:spPr bwMode="auto">
           <a:xfrm>
             <a:off x="1115616" y="4714692"/>
-            <a:ext cx="5131506" cy="1169551"/>
+            <a:ext cx="7848872" cy="1169551"/>
           </a:xfrm>
           <a:prstGeom prst="rect">
             <a:avLst/>
@@ -6339,21 +6339,13 @@
           </a:bodyPr>
           <a:lstStyle/>
           <a:p>
-            <a:pPr marL="0" marR="0" lvl="0" indent="0" algn="l" defTabSz="914400" rtl="0" eaLnBrk="1" fontAlgn="base" latinLnBrk="0" hangingPunct="1">
-              <a:lnSpc>
-                <a:spcPct val="100000"/>
-              </a:lnSpc>
+            <a:pPr fontAlgn="base">
               <a:spcBef>
                 <a:spcPct val="0"/>
               </a:spcBef>
               <a:spcAft>
                 <a:spcPct val="0"/>
               </a:spcAft>
-              <a:buClrTx/>
-              <a:buSzTx/>
-              <a:buFontTx/>
-              <a:buNone/>
-              <a:tabLst/>
             </a:pPr>
             <a:r>
               <a:rPr kumimoji="0" lang="ru-RU" sz="1400" b="1" i="0" u="none" strike="noStrike" cap="none" normalizeH="0" baseline="0" dirty="0" smtClean="0">
@@ -6392,6 +6384,55 @@
               <a:t> </a:t>
             </a:r>
             <a:r>
+              <a:rPr lang="en-US" sz="1400" b="1" dirty="0">
+                <a:latin typeface="Times New Roman" panose="02020603050405020304" pitchFamily="18" charset="0"/>
+                <a:cs typeface="Times New Roman" panose="02020603050405020304" pitchFamily="18" charset="0"/>
+              </a:rPr>
+              <a:t>(10 </a:t>
+            </a:r>
+            <a:r>
+              <a:rPr lang="ru-RU" sz="1400" b="1" dirty="0">
+                <a:latin typeface="Times New Roman" panose="02020603050405020304" pitchFamily="18" charset="0"/>
+                <a:cs typeface="Times New Roman" panose="02020603050405020304" pitchFamily="18" charset="0"/>
+              </a:rPr>
+              <a:t>с учетом </a:t>
+            </a:r>
+            <a:r>
+              <a:rPr lang="en-US" sz="1400" b="1" dirty="0">
+                <a:latin typeface="Times New Roman" panose="02020603050405020304" pitchFamily="18" charset="0"/>
+                <a:cs typeface="Times New Roman" panose="02020603050405020304" pitchFamily="18" charset="0"/>
+              </a:rPr>
+              <a:t>Chrome </a:t>
+            </a:r>
+            <a:r>
+              <a:rPr lang="ru-RU" sz="1400" b="1" dirty="0">
+                <a:latin typeface="Times New Roman" panose="02020603050405020304" pitchFamily="18" charset="0"/>
+                <a:cs typeface="Times New Roman" panose="02020603050405020304" pitchFamily="18" charset="0"/>
+              </a:rPr>
+              <a:t>и </a:t>
+            </a:r>
+            <a:r>
+              <a:rPr lang="en-US" sz="1400" b="1" dirty="0">
+                <a:latin typeface="Times New Roman" panose="02020603050405020304" pitchFamily="18" charset="0"/>
+                <a:cs typeface="Times New Roman" panose="02020603050405020304" pitchFamily="18" charset="0"/>
+              </a:rPr>
+              <a:t>Firefox</a:t>
+            </a:r>
+            <a:r>
+              <a:rPr lang="ru-RU" sz="1400" b="1" dirty="0" smtClean="0">
+                <a:latin typeface="Times New Roman" panose="02020603050405020304" pitchFamily="18" charset="0"/>
+                <a:cs typeface="Times New Roman" panose="02020603050405020304" pitchFamily="18" charset="0"/>
+              </a:rPr>
+              <a:t>)</a:t>
+            </a:r>
+            <a:r>
+              <a:rPr lang="en-US" sz="1400" b="1" dirty="0" smtClean="0">
+                <a:latin typeface="Times New Roman" panose="02020603050405020304" pitchFamily="18" charset="0"/>
+                <a:cs typeface="Times New Roman" panose="02020603050405020304" pitchFamily="18" charset="0"/>
+              </a:rPr>
+              <a:t> </a:t>
+            </a:r>
+            <a:r>
               <a:rPr kumimoji="0" lang="ru-RU" sz="1400" b="1" i="0" u="none" strike="noStrike" cap="none" normalizeH="0" baseline="0" dirty="0" err="1" smtClean="0">
                 <a:ln>
                   <a:noFill/>
@@ -6413,7 +6454,19 @@
                 <a:ea typeface="Calibri" pitchFamily="34" charset="0"/>
                 <a:cs typeface="Times New Roman" pitchFamily="18" charset="0"/>
               </a:rPr>
-              <a:t> с использованием:</a:t>
+              <a:t> </a:t>
+            </a:r>
+            <a:r>
+              <a:rPr kumimoji="0" lang="ru-RU" sz="1400" b="1" i="0" u="none" strike="noStrike" cap="none" normalizeH="0" baseline="0" dirty="0" smtClean="0">
+                <a:ln>
+                  <a:noFill/>
+                </a:ln>
+                <a:effectLst/>
+                <a:latin typeface="Times New Roman" pitchFamily="18" charset="0"/>
+                <a:ea typeface="Calibri" pitchFamily="34" charset="0"/>
+                <a:cs typeface="Times New Roman" pitchFamily="18" charset="0"/>
+              </a:rPr>
+              <a:t>с использованием:</a:t>
             </a:r>
             <a:endParaRPr kumimoji="0" lang="ru-RU" sz="1400" b="1" i="0" u="none" strike="noStrike" cap="none" normalizeH="0" baseline="0" dirty="0" smtClean="0">
               <a:ln>
@@ -8771,14 +8824,14 @@
       </p:sp>
       <p:pic>
         <p:nvPicPr>
-          <p:cNvPr id="8" name="Рисунок 7"/>
+          <p:cNvPr id="2" name="Рисунок 1"/>
           <p:cNvPicPr>
             <a:picLocks noChangeAspect="1"/>
           </p:cNvPicPr>
           <p:nvPr/>
         </p:nvPicPr>
         <p:blipFill>
-          <a:blip r:embed="rId2" cstate="print">
+          <a:blip r:embed="rId2">
             <a:extLst>
               <a:ext uri="{28A0092B-C50C-407E-A947-70E740481C1C}">
                 <a14:useLocalDpi xmlns:a14="http://schemas.microsoft.com/office/drawing/2010/main" val="0"/>
@@ -8791,62 +8844,12 @@
         </p:blipFill>
         <p:spPr>
           <a:xfrm>
-            <a:off x="3419872" y="1278052"/>
-            <a:ext cx="5616624" cy="2919475"/>
+            <a:off x="1181313" y="1829003"/>
+            <a:ext cx="7711168" cy="3930289"/>
           </a:xfrm>
           <a:prstGeom prst="rect">
             <a:avLst/>
           </a:prstGeom>
-          <a:ln>
-            <a:noFill/>
-          </a:ln>
-          <a:effectLst>
-            <a:outerShdw blurRad="190500" algn="tl" rotWithShape="0">
-              <a:srgbClr val="000000">
-                <a:alpha val="70000"/>
-              </a:srgbClr>
-            </a:outerShdw>
-          </a:effectLst>
-        </p:spPr>
-      </p:pic>
-      <p:pic>
-        <p:nvPicPr>
-          <p:cNvPr id="9" name="Рисунок 8"/>
-          <p:cNvPicPr>
-            <a:picLocks noChangeAspect="1"/>
-          </p:cNvPicPr>
-          <p:nvPr/>
-        </p:nvPicPr>
-        <p:blipFill>
-          <a:blip r:embed="rId3" cstate="print">
-            <a:extLst>
-              <a:ext uri="{28A0092B-C50C-407E-A947-70E740481C1C}">
-                <a14:useLocalDpi xmlns:a14="http://schemas.microsoft.com/office/drawing/2010/main" val="0"/>
-              </a:ext>
-            </a:extLst>
-          </a:blip>
-          <a:stretch>
-            <a:fillRect/>
-          </a:stretch>
-        </p:blipFill>
-        <p:spPr>
-          <a:xfrm>
-            <a:off x="1172824" y="3573016"/>
-            <a:ext cx="5378888" cy="2835122"/>
-          </a:xfrm>
-          <a:prstGeom prst="rect">
-            <a:avLst/>
-          </a:prstGeom>
-          <a:ln>
-            <a:noFill/>
-          </a:ln>
-          <a:effectLst>
-            <a:outerShdw blurRad="190500" algn="tl" rotWithShape="0">
-              <a:srgbClr val="000000">
-                <a:alpha val="70000"/>
-              </a:srgbClr>
-            </a:outerShdw>
-          </a:effectLst>
         </p:spPr>
       </p:pic>
     </p:spTree>
@@ -8959,36 +8962,6 @@
           </a:p>
         </p:txBody>
       </p:sp>
-      <p:pic>
-        <p:nvPicPr>
-          <p:cNvPr id="2" name="Рисунок 1"/>
-          <p:cNvPicPr>
-            <a:picLocks noChangeAspect="1"/>
-          </p:cNvPicPr>
-          <p:nvPr/>
-        </p:nvPicPr>
-        <p:blipFill>
-          <a:blip r:embed="rId2" cstate="print">
-            <a:extLst>
-              <a:ext uri="{28A0092B-C50C-407E-A947-70E740481C1C}">
-                <a14:useLocalDpi xmlns:a14="http://schemas.microsoft.com/office/drawing/2010/main" val="0"/>
-              </a:ext>
-            </a:extLst>
-          </a:blip>
-          <a:stretch>
-            <a:fillRect/>
-          </a:stretch>
-        </p:blipFill>
-        <p:spPr>
-          <a:xfrm>
-            <a:off x="2195735" y="435308"/>
-            <a:ext cx="5456855" cy="2876218"/>
-          </a:xfrm>
-          <a:prstGeom prst="rect">
-            <a:avLst/>
-          </a:prstGeom>
-        </p:spPr>
-      </p:pic>
       <p:sp>
         <p:nvSpPr>
           <p:cNvPr id="7" name="TextBox 6"/>
@@ -9061,7 +9034,37 @@
       </p:sp>
       <p:pic>
         <p:nvPicPr>
-          <p:cNvPr id="3" name="Рисунок 2"/>
+          <p:cNvPr id="4" name="Рисунок 3"/>
+          <p:cNvPicPr>
+            <a:picLocks noChangeAspect="1"/>
+          </p:cNvPicPr>
+          <p:nvPr/>
+        </p:nvPicPr>
+        <p:blipFill>
+          <a:blip r:embed="rId2" cstate="print">
+            <a:extLst>
+              <a:ext uri="{28A0092B-C50C-407E-A947-70E740481C1C}">
+                <a14:useLocalDpi xmlns:a14="http://schemas.microsoft.com/office/drawing/2010/main" val="0"/>
+              </a:ext>
+            </a:extLst>
+          </a:blip>
+          <a:stretch>
+            <a:fillRect/>
+          </a:stretch>
+        </p:blipFill>
+        <p:spPr>
+          <a:xfrm>
+            <a:off x="2170954" y="451307"/>
+            <a:ext cx="5713414" cy="2912058"/>
+          </a:xfrm>
+          <a:prstGeom prst="rect">
+            <a:avLst/>
+          </a:prstGeom>
+        </p:spPr>
+      </p:pic>
+      <p:pic>
+        <p:nvPicPr>
+          <p:cNvPr id="8" name="Рисунок 7"/>
           <p:cNvPicPr>
             <a:picLocks noChangeAspect="1"/>
           </p:cNvPicPr>
@@ -9081,8 +9084,8 @@
         </p:blipFill>
         <p:spPr>
           <a:xfrm>
-            <a:off x="2195734" y="3695867"/>
-            <a:ext cx="5456855" cy="2881902"/>
+            <a:off x="2170954" y="3703481"/>
+            <a:ext cx="6327566" cy="2893871"/>
           </a:xfrm>
           <a:prstGeom prst="rect">
             <a:avLst/>
@@ -9281,7 +9284,7 @@
       </p:sp>
       <p:pic>
         <p:nvPicPr>
-          <p:cNvPr id="4" name="Рисунок 3"/>
+          <p:cNvPr id="2" name="Рисунок 1"/>
           <p:cNvPicPr>
             <a:picLocks noChangeAspect="1"/>
           </p:cNvPicPr>
@@ -9301,8 +9304,8 @@
         </p:blipFill>
         <p:spPr>
           <a:xfrm>
-            <a:off x="2087723" y="431153"/>
-            <a:ext cx="5823917" cy="2857817"/>
+            <a:off x="2055305" y="449316"/>
+            <a:ext cx="6271826" cy="2897035"/>
           </a:xfrm>
           <a:prstGeom prst="rect">
             <a:avLst/>
@@ -9311,7 +9314,7 @@
       </p:pic>
       <p:pic>
         <p:nvPicPr>
-          <p:cNvPr id="5" name="Рисунок 4"/>
+          <p:cNvPr id="3" name="Рисунок 2"/>
           <p:cNvPicPr>
             <a:picLocks noChangeAspect="1"/>
           </p:cNvPicPr>
@@ -9331,8 +9334,8 @@
         </p:blipFill>
         <p:spPr>
           <a:xfrm>
-            <a:off x="2115505" y="3634219"/>
-            <a:ext cx="5796136" cy="3042971"/>
+            <a:off x="2028951" y="3759126"/>
+            <a:ext cx="6431481" cy="2984430"/>
           </a:xfrm>
           <a:prstGeom prst="rect">
             <a:avLst/>
@@ -9385,7 +9388,7 @@
           <p:nvPr>
             <p:extLst>
               <p:ext uri="{D42A27DB-BD31-4B8C-83A1-F6EECF244321}">
-                <p14:modId xmlns:p14="http://schemas.microsoft.com/office/powerpoint/2010/main" val="3192853643"/>
+                <p14:modId xmlns:p14="http://schemas.microsoft.com/office/powerpoint/2010/main" val="718246744"/>
               </p:ext>
             </p:extLst>
           </p:nvPr>
@@ -9964,12 +9967,54 @@
                         </a:tabLst>
                       </a:pPr>
                       <a:r>
-                        <a:rPr lang="ru-RU" sz="1600">
+                        <a:rPr lang="ru-RU" sz="1600" dirty="0" smtClean="0">
                           <a:effectLst/>
                         </a:rPr>
                         <a:t>5</a:t>
                       </a:r>
-                      <a:endParaRPr lang="ru-RU" sz="1600">
+                      <a:r>
+                        <a:rPr lang="en-US" sz="1600" dirty="0" smtClean="0">
+                          <a:effectLst/>
+                        </a:rPr>
+                        <a:t> (10 </a:t>
+                      </a:r>
+                      <a:r>
+                        <a:rPr lang="ru-RU" sz="1600" dirty="0" smtClean="0">
+                          <a:effectLst/>
+                        </a:rPr>
+                        <a:t>с</a:t>
+                      </a:r>
+                      <a:r>
+                        <a:rPr lang="ru-RU" sz="1600" baseline="0" dirty="0" smtClean="0">
+                          <a:effectLst/>
+                        </a:rPr>
+                        <a:t> учетом </a:t>
+                      </a:r>
+                      <a:r>
+                        <a:rPr lang="en-US" sz="1600" baseline="0" dirty="0" smtClean="0">
+                          <a:effectLst/>
+                        </a:rPr>
+                        <a:t>Chrome </a:t>
+                      </a:r>
+                      <a:r>
+                        <a:rPr lang="ru-RU" sz="1600" baseline="0" dirty="0" smtClean="0">
+                          <a:effectLst/>
+                        </a:rPr>
+                        <a:t>и </a:t>
+                      </a:r>
+                      <a:r>
+                        <a:rPr lang="en-US" sz="1600" baseline="0" dirty="0" smtClean="0">
+                          <a:effectLst/>
+                        </a:rPr>
+                        <a:t>Firefox</a:t>
+                      </a:r>
+                      <a:r>
+                        <a:rPr lang="ru-RU" sz="1600" baseline="0" dirty="0" smtClean="0">
+                          <a:effectLst/>
+                        </a:rPr>
+                        <a:t>)</a:t>
+                      </a:r>
+                      <a:endParaRPr lang="ru-RU" sz="1600" dirty="0">
                         <a:effectLst/>
                         <a:latin typeface="Calibri"/>
                         <a:ea typeface="Calibri"/>
@@ -10751,6 +10796,13 @@
   <p:clrMapOvr>
     <a:masterClrMapping/>
   </p:clrMapOvr>
+  <p:timing>
+    <p:tnLst>
+      <p:par>
+        <p:cTn id="1" dur="indefinite" restart="never" nodeType="tmRoot"/>
+      </p:par>
+    </p:tnLst>
+  </p:timing>
 </p:sld>
 </file>
 
@@ -11607,6 +11659,13 @@
   <p:clrMapOvr>
     <a:masterClrMapping/>
   </p:clrMapOvr>
+  <p:timing>
+    <p:tnLst>
+      <p:par>
+        <p:cTn id="1" dur="indefinite" restart="never" nodeType="tmRoot"/>
+      </p:par>
+    </p:tnLst>
+  </p:timing>
 </p:sld>
 </file>
 
@@ -14936,7 +14995,7 @@
           <a:graphicData uri="http://schemas.openxmlformats.org/presentationml/2006/ole">
             <mc:AlternateContent xmlns:mc="http://schemas.openxmlformats.org/markup-compatibility/2006">
               <mc:Choice xmlns:v="urn:schemas-microsoft-com:vml" Requires="v">
-                <p:oleObj spid="_x0000_s1085" name="Document" r:id="rId3" imgW="6084454" imgH="3709933" progId="Word.Document.12">
+                <p:oleObj spid="_x0000_s1099" name="Document" r:id="rId3" imgW="6084454" imgH="3709933" progId="Word.Document.12">
                   <p:embed/>
                 </p:oleObj>
               </mc:Choice>
@@ -15078,7 +15137,7 @@
           <a:graphicData uri="http://schemas.openxmlformats.org/presentationml/2006/ole">
             <mc:AlternateContent xmlns:mc="http://schemas.openxmlformats.org/markup-compatibility/2006">
               <mc:Choice xmlns:v="urn:schemas-microsoft-com:vml" Requires="v">
-                <p:oleObj spid="_x0000_s1086" name="Document" r:id="rId5" imgW="6084454" imgH="3132472" progId="Word.Document.12">
+                <p:oleObj spid="_x0000_s1100" name="Document" r:id="rId5" imgW="6084454" imgH="3132472" progId="Word.Document.12">
                   <p:embed/>
                 </p:oleObj>
               </mc:Choice>
@@ -15197,7 +15256,7 @@
           <a:graphicData uri="http://schemas.openxmlformats.org/presentationml/2006/ole">
             <mc:AlternateContent xmlns:mc="http://schemas.openxmlformats.org/markup-compatibility/2006">
               <mc:Choice xmlns:v="urn:schemas-microsoft-com:vml" Requires="v">
-                <p:oleObj spid="_x0000_s1087" name="Document" r:id="rId7" imgW="6084454" imgH="2981627" progId="Word.Document.12">
+                <p:oleObj spid="_x0000_s1101" name="Document" r:id="rId7" imgW="6084454" imgH="2981627" progId="Word.Document.12">
                   <p:embed/>
                 </p:oleObj>
               </mc:Choice>
@@ -15308,7 +15367,7 @@
           <a:graphicData uri="http://schemas.openxmlformats.org/presentationml/2006/ole">
             <mc:AlternateContent xmlns:mc="http://schemas.openxmlformats.org/markup-compatibility/2006">
               <mc:Choice xmlns:v="urn:schemas-microsoft-com:vml" Requires="v">
-                <p:oleObj spid="_x0000_s1088" name="Document" r:id="rId9" imgW="6084454" imgH="3309239" progId="Word.Document.12">
+                <p:oleObj spid="_x0000_s1102" name="Document" r:id="rId9" imgW="6084454" imgH="3309239" progId="Word.Document.12">
                   <p:embed/>
                 </p:oleObj>
               </mc:Choice>
@@ -15410,7 +15469,7 @@
           <a:graphicData uri="http://schemas.openxmlformats.org/presentationml/2006/ole">
             <mc:AlternateContent xmlns:mc="http://schemas.openxmlformats.org/markup-compatibility/2006">
               <mc:Choice xmlns:v="urn:schemas-microsoft-com:vml" Requires="v">
-                <p:oleObj spid="_x0000_s1089" name="Document" r:id="rId11" imgW="6084454" imgH="1476773" progId="Word.Document.12">
+                <p:oleObj spid="_x0000_s1103" name="Document" r:id="rId11" imgW="6084454" imgH="1476773" progId="Word.Document.12">
                   <p:embed/>
                 </p:oleObj>
               </mc:Choice>
@@ -15536,7 +15595,7 @@
           <a:graphicData uri="http://schemas.openxmlformats.org/presentationml/2006/ole">
             <mc:AlternateContent xmlns:mc="http://schemas.openxmlformats.org/markup-compatibility/2006">
               <mc:Choice xmlns:v="urn:schemas-microsoft-com:vml" Requires="v">
-                <p:oleObj spid="_x0000_s1090" name="Document" r:id="rId13" imgW="6084454" imgH="2162238" progId="Word.Document.12">
+                <p:oleObj spid="_x0000_s1104" name="Document" r:id="rId13" imgW="6084454" imgH="2162238" progId="Word.Document.12">
                   <p:embed/>
                 </p:oleObj>
               </mc:Choice>
@@ -15639,7 +15698,7 @@
           <a:graphicData uri="http://schemas.openxmlformats.org/presentationml/2006/ole">
             <mc:AlternateContent xmlns:mc="http://schemas.openxmlformats.org/markup-compatibility/2006">
               <mc:Choice xmlns:v="urn:schemas-microsoft-com:vml" Requires="v">
-                <p:oleObj spid="_x0000_s1091" name="Document" r:id="rId15" imgW="6084454" imgH="1004796" progId="Word.Document.12">
+                <p:oleObj spid="_x0000_s1105" name="Document" r:id="rId15" imgW="6084454" imgH="1004796" progId="Word.Document.12">
                   <p:embed/>
                 </p:oleObj>
               </mc:Choice>
@@ -15944,7 +16003,7 @@
           <a:graphicData uri="http://schemas.openxmlformats.org/presentationml/2006/ole">
             <mc:AlternateContent xmlns:mc="http://schemas.openxmlformats.org/markup-compatibility/2006">
               <mc:Choice xmlns:v="urn:schemas-microsoft-com:vml" Requires="v">
-                <p:oleObj spid="_x0000_s2083" name="Document" r:id="rId3" imgW="6084454" imgH="1818065" progId="Word.Document.12">
+                <p:oleObj spid="_x0000_s2093" name="Document" r:id="rId3" imgW="6084454" imgH="1818065" progId="Word.Document.12">
                   <p:embed/>
                 </p:oleObj>
               </mc:Choice>
@@ -16001,7 +16060,7 @@
           <a:graphicData uri="http://schemas.openxmlformats.org/presentationml/2006/ole">
             <mc:AlternateContent xmlns:mc="http://schemas.openxmlformats.org/markup-compatibility/2006">
               <mc:Choice xmlns:v="urn:schemas-microsoft-com:vml" Requires="v">
-                <p:oleObj spid="_x0000_s2084" name="Document" r:id="rId5" imgW="6084454" imgH="1471733" progId="Word.Document.12">
+                <p:oleObj spid="_x0000_s2094" name="Document" r:id="rId5" imgW="6084454" imgH="1471733" progId="Word.Document.12">
                   <p:embed/>
                 </p:oleObj>
               </mc:Choice>
@@ -16058,7 +16117,7 @@
           <a:graphicData uri="http://schemas.openxmlformats.org/presentationml/2006/ole">
             <mc:AlternateContent xmlns:mc="http://schemas.openxmlformats.org/markup-compatibility/2006">
               <mc:Choice xmlns:v="urn:schemas-microsoft-com:vml" Requires="v">
-                <p:oleObj spid="_x0000_s2085" name="Document" r:id="rId7" imgW="6084454" imgH="1326288" progId="Word.Document.12">
+                <p:oleObj spid="_x0000_s2095" name="Document" r:id="rId7" imgW="6084454" imgH="1326288" progId="Word.Document.12">
                   <p:embed/>
                 </p:oleObj>
               </mc:Choice>
@@ -16115,7 +16174,7 @@
           <a:graphicData uri="http://schemas.openxmlformats.org/presentationml/2006/ole">
             <mc:AlternateContent xmlns:mc="http://schemas.openxmlformats.org/markup-compatibility/2006">
               <mc:Choice xmlns:v="urn:schemas-microsoft-com:vml" Requires="v">
-                <p:oleObj spid="_x0000_s2086" name="Document" r:id="rId9" imgW="6084454" imgH="1653899" progId="Word.Document.12">
+                <p:oleObj spid="_x0000_s2096" name="Document" r:id="rId9" imgW="6084454" imgH="1653899" progId="Word.Document.12">
                   <p:embed/>
                 </p:oleObj>
               </mc:Choice>
@@ -16208,7 +16267,7 @@
           <a:graphicData uri="http://schemas.openxmlformats.org/presentationml/2006/ole">
             <mc:AlternateContent xmlns:mc="http://schemas.openxmlformats.org/markup-compatibility/2006">
               <mc:Choice xmlns:v="urn:schemas-microsoft-com:vml" Requires="v">
-                <p:oleObj spid="_x0000_s2087" name="Document" r:id="rId11" imgW="6084454" imgH="2379685" progId="Word.Document.12">
+                <p:oleObj spid="_x0000_s2097" name="Document" r:id="rId11" imgW="6084454" imgH="2379685" progId="Word.Document.12">
                   <p:embed/>
                 </p:oleObj>
               </mc:Choice>
@@ -16534,7 +16593,7 @@
           <a:graphicData uri="http://schemas.openxmlformats.org/presentationml/2006/ole">
             <mc:AlternateContent xmlns:mc="http://schemas.openxmlformats.org/markup-compatibility/2006">
               <mc:Choice xmlns:v="urn:schemas-microsoft-com:vml" Requires="v">
-                <p:oleObj spid="_x0000_s3080" name="Worksheet" r:id="rId3" imgW="9934531" imgH="9220121" progId="Excel.Sheet.12">
+                <p:oleObj spid="_x0000_s3082" name="Worksheet" r:id="rId3" imgW="9934531" imgH="9220121" progId="Excel.Sheet.12">
                   <p:embed/>
                 </p:oleObj>
               </mc:Choice>
